--- a/论文图片/图片转pdf/第三章/眼动心理物理学实验单试次时序流程图.pptx
+++ b/论文图片/图片转pdf/第三章/眼动心理物理学实验单试次时序流程图.pptx
@@ -107,7 +107,7 @@
   <p:extLst>
     <p:ext uri="{EFAFB233-063F-42B5-8137-9DF3F51BA10A}">
       <p15:sldGuideLst xmlns:p15="http://schemas.microsoft.com/office/powerpoint/2012/main">
-        <p15:guide id="1" orient="horz" pos="1247" userDrawn="1">
+        <p15:guide id="1" orient="horz" pos="1212" userDrawn="1">
           <p15:clr>
             <a:srgbClr val="A4A3A4"/>
           </p15:clr>
@@ -2930,260 +2930,245 @@
         <p:nvPr/>
       </p:nvGrpSpPr>
       <p:grpSpPr/>
-      <p:grpSp>
-        <p:nvGrpSpPr>
-          <p:cNvPr id="9" name="组合 8"/>
-          <p:cNvGrpSpPr/>
+      <p:pic>
+        <p:nvPicPr>
+          <p:cNvPr id="4" name="图片 3"/>
+          <p:cNvPicPr>
+            <a:picLocks noChangeAspect="1"/>
+          </p:cNvPicPr>
           <p:nvPr/>
-        </p:nvGrpSpPr>
-        <p:grpSpPr>
+        </p:nvPicPr>
+        <p:blipFill>
+          <a:blip r:embed="rId1"/>
+          <a:stretch>
+            <a:fillRect/>
+          </a:stretch>
+        </p:blipFill>
+        <p:spPr>
           <a:xfrm>
-            <a:off x="62230" y="48260"/>
-            <a:ext cx="11238865" cy="3873500"/>
-            <a:chOff x="979" y="2556"/>
-            <a:chExt cx="17699" cy="6100"/>
+            <a:off x="62230" y="334645"/>
+            <a:ext cx="11238865" cy="3181350"/>
           </a:xfrm>
-        </p:grpSpPr>
-        <p:pic>
-          <p:nvPicPr>
-            <p:cNvPr id="4" name="图片 3"/>
-            <p:cNvPicPr>
-              <a:picLocks noChangeAspect="1"/>
-            </p:cNvPicPr>
-            <p:nvPr/>
-          </p:nvPicPr>
-          <p:blipFill>
-            <a:blip r:embed="rId1"/>
-            <a:stretch>
-              <a:fillRect/>
-            </a:stretch>
-          </p:blipFill>
-          <p:spPr>
-            <a:xfrm>
-              <a:off x="979" y="3007"/>
-              <a:ext cx="17699" cy="5010"/>
-            </a:xfrm>
-            <a:prstGeom prst="rect">
-              <a:avLst/>
-            </a:prstGeom>
-          </p:spPr>
-        </p:pic>
-        <p:sp>
-          <p:nvSpPr>
-            <p:cNvPr id="112" name="文本框 111"/>
-            <p:cNvSpPr txBox="1"/>
-            <p:nvPr/>
-          </p:nvSpPr>
-          <p:spPr>
-            <a:xfrm>
-              <a:off x="2242" y="8125"/>
-              <a:ext cx="2250" cy="531"/>
-            </a:xfrm>
-            <a:prstGeom prst="rect">
-              <a:avLst/>
-            </a:prstGeom>
-            <a:noFill/>
-          </p:spPr>
-          <p:txBody>
-            <a:bodyPr wrap="square" rtlCol="0">
-              <a:spAutoFit/>
-            </a:bodyPr>
-            <a:p>
-              <a:r>
-                <a:rPr lang="zh-CN" altLang="en-US" sz="1600" b="1">
-                  <a:solidFill>
-                    <a:schemeClr val="tx1"/>
-                  </a:solidFill>
-                  <a:latin typeface="宋体" panose="02010600030101010101" pitchFamily="2" charset="-122"/>
-                  <a:ea typeface="宋体" panose="02010600030101010101" pitchFamily="2" charset="-122"/>
-                  <a:sym typeface="+mn-ea"/>
-                </a:rPr>
-                <a:t>初始注视位置</a:t>
-              </a:r>
-              <a:endParaRPr lang="zh-CN" altLang="en-US" sz="1600" b="1">
+          <a:prstGeom prst="rect">
+            <a:avLst/>
+          </a:prstGeom>
+        </p:spPr>
+      </p:pic>
+      <p:sp>
+        <p:nvSpPr>
+          <p:cNvPr id="112" name="文本框 111"/>
+          <p:cNvSpPr txBox="1"/>
+          <p:nvPr/>
+        </p:nvSpPr>
+        <p:spPr>
+          <a:xfrm>
+            <a:off x="649605" y="3554095"/>
+            <a:ext cx="2117090" cy="398780"/>
+          </a:xfrm>
+          <a:prstGeom prst="rect">
+            <a:avLst/>
+          </a:prstGeom>
+          <a:noFill/>
+        </p:spPr>
+        <p:txBody>
+          <a:bodyPr wrap="square" rtlCol="0">
+            <a:spAutoFit/>
+          </a:bodyPr>
+          <a:p>
+            <a:r>
+              <a:rPr lang="zh-CN" altLang="en-US" sz="2000">
                 <a:solidFill>
                   <a:schemeClr val="tx1"/>
                 </a:solidFill>
                 <a:latin typeface="宋体" panose="02010600030101010101" pitchFamily="2" charset="-122"/>
                 <a:ea typeface="宋体" panose="02010600030101010101" pitchFamily="2" charset="-122"/>
                 <a:sym typeface="+mn-ea"/>
-              </a:endParaRPr>
-            </a:p>
-          </p:txBody>
-        </p:sp>
-        <p:sp>
-          <p:nvSpPr>
-            <p:cNvPr id="5" name="文本框 4"/>
-            <p:cNvSpPr txBox="1"/>
-            <p:nvPr/>
-          </p:nvSpPr>
-          <p:spPr>
-            <a:xfrm>
-              <a:off x="6898" y="8125"/>
-              <a:ext cx="2025" cy="531"/>
-            </a:xfrm>
-            <a:prstGeom prst="rect">
-              <a:avLst/>
-            </a:prstGeom>
-            <a:noFill/>
-          </p:spPr>
-          <p:txBody>
-            <a:bodyPr wrap="square" rtlCol="0">
-              <a:spAutoFit/>
-            </a:bodyPr>
-            <a:p>
-              <a:r>
-                <a:rPr lang="zh-CN" altLang="en-US" sz="1600" b="1">
-                  <a:solidFill>
-                    <a:schemeClr val="tx1"/>
-                  </a:solidFill>
-                  <a:latin typeface="宋体" panose="02010600030101010101" pitchFamily="2" charset="-122"/>
-                  <a:ea typeface="宋体" panose="02010600030101010101" pitchFamily="2" charset="-122"/>
-                  <a:sym typeface="+mn-ea"/>
-                </a:rPr>
-                <a:t>扫视开始</a:t>
-              </a:r>
-              <a:endParaRPr lang="zh-CN" altLang="en-US" sz="1600" b="1">
+              </a:rPr>
+              <a:t>初始注视位置</a:t>
+            </a:r>
+            <a:endParaRPr lang="zh-CN" altLang="en-US" sz="2000">
+              <a:solidFill>
+                <a:schemeClr val="tx1"/>
+              </a:solidFill>
+              <a:latin typeface="宋体" panose="02010600030101010101" pitchFamily="2" charset="-122"/>
+              <a:ea typeface="宋体" panose="02010600030101010101" pitchFamily="2" charset="-122"/>
+              <a:sym typeface="+mn-ea"/>
+            </a:endParaRPr>
+          </a:p>
+        </p:txBody>
+      </p:sp>
+      <p:sp>
+        <p:nvSpPr>
+          <p:cNvPr id="5" name="文本框 4"/>
+          <p:cNvSpPr txBox="1"/>
+          <p:nvPr/>
+        </p:nvSpPr>
+        <p:spPr>
+          <a:xfrm>
+            <a:off x="3558540" y="3554095"/>
+            <a:ext cx="1548130" cy="398780"/>
+          </a:xfrm>
+          <a:prstGeom prst="rect">
+            <a:avLst/>
+          </a:prstGeom>
+          <a:noFill/>
+        </p:spPr>
+        <p:txBody>
+          <a:bodyPr wrap="square" rtlCol="0">
+            <a:spAutoFit/>
+          </a:bodyPr>
+          <a:p>
+            <a:r>
+              <a:rPr lang="zh-CN" altLang="en-US" sz="2000">
                 <a:solidFill>
                   <a:schemeClr val="tx1"/>
                 </a:solidFill>
                 <a:latin typeface="宋体" panose="02010600030101010101" pitchFamily="2" charset="-122"/>
                 <a:ea typeface="宋体" panose="02010600030101010101" pitchFamily="2" charset="-122"/>
                 <a:sym typeface="+mn-ea"/>
-              </a:endParaRPr>
-            </a:p>
-          </p:txBody>
-        </p:sp>
-        <p:sp>
-          <p:nvSpPr>
-            <p:cNvPr id="6" name="文本框 5"/>
-            <p:cNvSpPr txBox="1"/>
-            <p:nvPr/>
-          </p:nvSpPr>
-          <p:spPr>
-            <a:xfrm>
-              <a:off x="11046" y="8125"/>
-              <a:ext cx="2025" cy="531"/>
-            </a:xfrm>
-            <a:prstGeom prst="rect">
-              <a:avLst/>
-            </a:prstGeom>
-            <a:noFill/>
-          </p:spPr>
-          <p:txBody>
-            <a:bodyPr wrap="square" rtlCol="0">
-              <a:spAutoFit/>
-            </a:bodyPr>
-            <a:p>
-              <a:r>
-                <a:rPr lang="zh-CN" altLang="en-US" sz="1600" b="1">
-                  <a:solidFill>
-                    <a:schemeClr val="tx1"/>
-                  </a:solidFill>
-                  <a:latin typeface="宋体" panose="02010600030101010101" pitchFamily="2" charset="-122"/>
-                  <a:ea typeface="宋体" panose="02010600030101010101" pitchFamily="2" charset="-122"/>
-                  <a:sym typeface="+mn-ea"/>
-                </a:rPr>
-                <a:t>扫视结束</a:t>
-              </a:r>
-              <a:endParaRPr lang="zh-CN" altLang="en-US" sz="1600" b="1">
+              </a:rPr>
+              <a:t>扫视开始</a:t>
+            </a:r>
+            <a:endParaRPr lang="zh-CN" altLang="en-US" sz="2000">
+              <a:solidFill>
+                <a:schemeClr val="tx1"/>
+              </a:solidFill>
+              <a:latin typeface="宋体" panose="02010600030101010101" pitchFamily="2" charset="-122"/>
+              <a:ea typeface="宋体" panose="02010600030101010101" pitchFamily="2" charset="-122"/>
+              <a:sym typeface="+mn-ea"/>
+            </a:endParaRPr>
+          </a:p>
+        </p:txBody>
+      </p:sp>
+      <p:sp>
+        <p:nvSpPr>
+          <p:cNvPr id="6" name="文本框 5"/>
+          <p:cNvSpPr txBox="1"/>
+          <p:nvPr/>
+        </p:nvSpPr>
+        <p:spPr>
+          <a:xfrm>
+            <a:off x="6447155" y="3554095"/>
+            <a:ext cx="1546225" cy="398780"/>
+          </a:xfrm>
+          <a:prstGeom prst="rect">
+            <a:avLst/>
+          </a:prstGeom>
+          <a:noFill/>
+        </p:spPr>
+        <p:txBody>
+          <a:bodyPr wrap="square" rtlCol="0">
+            <a:spAutoFit/>
+          </a:bodyPr>
+          <a:p>
+            <a:r>
+              <a:rPr lang="zh-CN" altLang="en-US" sz="2000">
                 <a:solidFill>
                   <a:schemeClr val="tx1"/>
                 </a:solidFill>
                 <a:latin typeface="宋体" panose="02010600030101010101" pitchFamily="2" charset="-122"/>
                 <a:ea typeface="宋体" panose="02010600030101010101" pitchFamily="2" charset="-122"/>
                 <a:sym typeface="+mn-ea"/>
-              </a:endParaRPr>
-            </a:p>
-          </p:txBody>
-        </p:sp>
-        <p:sp>
-          <p:nvSpPr>
-            <p:cNvPr id="7" name="文本框 6"/>
-            <p:cNvSpPr txBox="1"/>
-            <p:nvPr/>
-          </p:nvSpPr>
-          <p:spPr>
-            <a:xfrm>
-              <a:off x="15138" y="8125"/>
-              <a:ext cx="2364" cy="531"/>
-            </a:xfrm>
-            <a:prstGeom prst="rect">
-              <a:avLst/>
-            </a:prstGeom>
-            <a:noFill/>
-          </p:spPr>
-          <p:txBody>
-            <a:bodyPr wrap="square" rtlCol="0">
-              <a:spAutoFit/>
-            </a:bodyPr>
-            <a:p>
-              <a:r>
-                <a:rPr lang="zh-CN" altLang="en-US" sz="1600" b="1">
-                  <a:solidFill>
-                    <a:schemeClr val="tx1"/>
-                  </a:solidFill>
-                  <a:latin typeface="宋体" panose="02010600030101010101" pitchFamily="2" charset="-122"/>
-                  <a:ea typeface="宋体" panose="02010600030101010101" pitchFamily="2" charset="-122"/>
-                  <a:sym typeface="+mn-ea"/>
-                </a:rPr>
-                <a:t>辨别条纹方向</a:t>
-              </a:r>
-              <a:endParaRPr lang="zh-CN" altLang="en-US" sz="1600" b="1">
+              </a:rPr>
+              <a:t>扫视结束</a:t>
+            </a:r>
+            <a:endParaRPr lang="zh-CN" altLang="en-US" sz="2000">
+              <a:solidFill>
+                <a:schemeClr val="tx1"/>
+              </a:solidFill>
+              <a:latin typeface="宋体" panose="02010600030101010101" pitchFamily="2" charset="-122"/>
+              <a:ea typeface="宋体" panose="02010600030101010101" pitchFamily="2" charset="-122"/>
+              <a:sym typeface="+mn-ea"/>
+            </a:endParaRPr>
+          </a:p>
+        </p:txBody>
+      </p:sp>
+      <p:sp>
+        <p:nvSpPr>
+          <p:cNvPr id="7" name="文本框 6"/>
+          <p:cNvSpPr txBox="1"/>
+          <p:nvPr/>
+        </p:nvSpPr>
+        <p:spPr>
+          <a:xfrm>
+            <a:off x="8877300" y="3561715"/>
+            <a:ext cx="1981835" cy="398780"/>
+          </a:xfrm>
+          <a:prstGeom prst="rect">
+            <a:avLst/>
+          </a:prstGeom>
+          <a:noFill/>
+        </p:spPr>
+        <p:txBody>
+          <a:bodyPr wrap="square" rtlCol="0">
+            <a:spAutoFit/>
+          </a:bodyPr>
+          <a:p>
+            <a:r>
+              <a:rPr lang="zh-CN" altLang="en-US" sz="2000">
                 <a:solidFill>
                   <a:schemeClr val="tx1"/>
                 </a:solidFill>
                 <a:latin typeface="宋体" panose="02010600030101010101" pitchFamily="2" charset="-122"/>
                 <a:ea typeface="宋体" panose="02010600030101010101" pitchFamily="2" charset="-122"/>
                 <a:sym typeface="+mn-ea"/>
-              </a:endParaRPr>
-            </a:p>
-          </p:txBody>
-        </p:sp>
-        <p:sp>
-          <p:nvSpPr>
-            <p:cNvPr id="8" name="文本框 7"/>
-            <p:cNvSpPr txBox="1"/>
-            <p:nvPr/>
-          </p:nvSpPr>
-          <p:spPr>
-            <a:xfrm>
-              <a:off x="13379" y="2556"/>
-              <a:ext cx="2025" cy="531"/>
-            </a:xfrm>
-            <a:prstGeom prst="rect">
-              <a:avLst/>
-            </a:prstGeom>
-            <a:noFill/>
-          </p:spPr>
-          <p:txBody>
-            <a:bodyPr wrap="square" rtlCol="0">
-              <a:spAutoFit/>
-            </a:bodyPr>
-            <a:p>
-              <a:r>
-                <a:rPr lang="zh-CN" altLang="en-US" sz="1600" b="1">
-                  <a:solidFill>
-                    <a:schemeClr val="tx1"/>
-                  </a:solidFill>
-                  <a:latin typeface="宋体" panose="02010600030101010101" pitchFamily="2" charset="-122"/>
-                  <a:ea typeface="宋体" panose="02010600030101010101" pitchFamily="2" charset="-122"/>
-                  <a:sym typeface="+mn-ea"/>
-                </a:rPr>
-                <a:t>延迟时间</a:t>
-              </a:r>
-              <a:endParaRPr lang="zh-CN" altLang="en-US" sz="1600" b="1">
+              </a:rPr>
+              <a:t>辨别条纹方向</a:t>
+            </a:r>
+            <a:endParaRPr lang="zh-CN" altLang="en-US" sz="2000">
+              <a:solidFill>
+                <a:schemeClr val="tx1"/>
+              </a:solidFill>
+              <a:latin typeface="宋体" panose="02010600030101010101" pitchFamily="2" charset="-122"/>
+              <a:ea typeface="宋体" panose="02010600030101010101" pitchFamily="2" charset="-122"/>
+              <a:sym typeface="+mn-ea"/>
+            </a:endParaRPr>
+          </a:p>
+        </p:txBody>
+      </p:sp>
+      <p:sp>
+        <p:nvSpPr>
+          <p:cNvPr id="8" name="文本框 7"/>
+          <p:cNvSpPr txBox="1"/>
+          <p:nvPr/>
+        </p:nvSpPr>
+        <p:spPr>
+          <a:xfrm>
+            <a:off x="7790180" y="10160"/>
+            <a:ext cx="1645285" cy="398780"/>
+          </a:xfrm>
+          <a:prstGeom prst="rect">
+            <a:avLst/>
+          </a:prstGeom>
+          <a:noFill/>
+        </p:spPr>
+        <p:txBody>
+          <a:bodyPr wrap="square" rtlCol="0">
+            <a:spAutoFit/>
+          </a:bodyPr>
+          <a:p>
+            <a:r>
+              <a:rPr lang="zh-CN" altLang="en-US" sz="2000">
                 <a:solidFill>
                   <a:schemeClr val="tx1"/>
                 </a:solidFill>
                 <a:latin typeface="宋体" panose="02010600030101010101" pitchFamily="2" charset="-122"/>
                 <a:ea typeface="宋体" panose="02010600030101010101" pitchFamily="2" charset="-122"/>
                 <a:sym typeface="+mn-ea"/>
-              </a:endParaRPr>
-            </a:p>
-          </p:txBody>
-        </p:sp>
-      </p:grpSp>
+              </a:rPr>
+              <a:t>延迟时间</a:t>
+            </a:r>
+            <a:endParaRPr lang="zh-CN" altLang="en-US" sz="2000">
+              <a:solidFill>
+                <a:schemeClr val="tx1"/>
+              </a:solidFill>
+              <a:latin typeface="宋体" panose="02010600030101010101" pitchFamily="2" charset="-122"/>
+              <a:ea typeface="宋体" panose="02010600030101010101" pitchFamily="2" charset="-122"/>
+              <a:sym typeface="+mn-ea"/>
+            </a:endParaRPr>
+          </a:p>
+        </p:txBody>
+      </p:sp>
     </p:spTree>
   </p:cSld>
   <p:clrMapOvr>

--- a/论文图片/图片转pdf/第三章/眼动心理物理学实验单试次时序流程图.pptx
+++ b/论文图片/图片转pdf/第三章/眼动心理物理学实验单试次时序流程图.pptx
@@ -3169,6 +3169,147 @@
           </a:p>
         </p:txBody>
       </p:sp>
+      <p:sp>
+        <p:nvSpPr>
+          <p:cNvPr id="2" name="右箭头 1"/>
+          <p:cNvSpPr/>
+          <p:nvPr/>
+        </p:nvSpPr>
+        <p:spPr>
+          <a:xfrm>
+            <a:off x="2823845" y="1914525"/>
+            <a:ext cx="168275" cy="191135"/>
+          </a:xfrm>
+          <a:prstGeom prst="rightArrow">
+            <a:avLst/>
+          </a:prstGeom>
+          <a:solidFill>
+            <a:schemeClr val="tx1"/>
+          </a:solidFill>
+          <a:ln>
+            <a:solidFill>
+              <a:schemeClr val="tx1"/>
+            </a:solidFill>
+          </a:ln>
+        </p:spPr>
+        <p:style>
+          <a:lnRef idx="2">
+            <a:schemeClr val="accent1">
+              <a:lumMod val="75000"/>
+            </a:schemeClr>
+          </a:lnRef>
+          <a:fillRef idx="1">
+            <a:schemeClr val="accent1"/>
+          </a:fillRef>
+          <a:effectRef idx="0">
+            <a:srgbClr val="FFFFFF"/>
+          </a:effectRef>
+          <a:fontRef idx="minor">
+            <a:schemeClr val="lt1"/>
+          </a:fontRef>
+        </p:style>
+        <p:txBody>
+          <a:bodyPr rtlCol="0" anchor="ctr"/>
+          <a:p>
+            <a:pPr algn="ctr"/>
+            <a:endParaRPr lang="zh-CN" altLang="en-US"/>
+          </a:p>
+        </p:txBody>
+      </p:sp>
+      <p:sp>
+        <p:nvSpPr>
+          <p:cNvPr id="3" name="右箭头 2"/>
+          <p:cNvSpPr/>
+          <p:nvPr/>
+        </p:nvSpPr>
+        <p:spPr>
+          <a:xfrm>
+            <a:off x="5553075" y="1914525"/>
+            <a:ext cx="168275" cy="191135"/>
+          </a:xfrm>
+          <a:prstGeom prst="rightArrow">
+            <a:avLst/>
+          </a:prstGeom>
+          <a:solidFill>
+            <a:schemeClr val="tx1"/>
+          </a:solidFill>
+          <a:ln>
+            <a:solidFill>
+              <a:schemeClr val="tx1"/>
+            </a:solidFill>
+          </a:ln>
+        </p:spPr>
+        <p:style>
+          <a:lnRef idx="2">
+            <a:schemeClr val="accent1">
+              <a:lumMod val="75000"/>
+            </a:schemeClr>
+          </a:lnRef>
+          <a:fillRef idx="1">
+            <a:schemeClr val="accent1"/>
+          </a:fillRef>
+          <a:effectRef idx="0">
+            <a:srgbClr val="FFFFFF"/>
+          </a:effectRef>
+          <a:fontRef idx="minor">
+            <a:schemeClr val="lt1"/>
+          </a:fontRef>
+        </p:style>
+        <p:txBody>
+          <a:bodyPr rtlCol="0" anchor="ctr"/>
+          <a:p>
+            <a:pPr algn="ctr"/>
+            <a:endParaRPr lang="zh-CN" altLang="en-US"/>
+          </a:p>
+        </p:txBody>
+      </p:sp>
+      <p:sp>
+        <p:nvSpPr>
+          <p:cNvPr id="9" name="右箭头 8"/>
+          <p:cNvSpPr/>
+          <p:nvPr/>
+        </p:nvSpPr>
+        <p:spPr>
+          <a:xfrm>
+            <a:off x="8282305" y="1914525"/>
+            <a:ext cx="168275" cy="191135"/>
+          </a:xfrm>
+          <a:prstGeom prst="rightArrow">
+            <a:avLst/>
+          </a:prstGeom>
+          <a:solidFill>
+            <a:schemeClr val="tx1"/>
+          </a:solidFill>
+          <a:ln>
+            <a:solidFill>
+              <a:schemeClr val="tx1"/>
+            </a:solidFill>
+          </a:ln>
+        </p:spPr>
+        <p:style>
+          <a:lnRef idx="2">
+            <a:schemeClr val="accent1">
+              <a:lumMod val="75000"/>
+            </a:schemeClr>
+          </a:lnRef>
+          <a:fillRef idx="1">
+            <a:schemeClr val="accent1"/>
+          </a:fillRef>
+          <a:effectRef idx="0">
+            <a:srgbClr val="FFFFFF"/>
+          </a:effectRef>
+          <a:fontRef idx="minor">
+            <a:schemeClr val="lt1"/>
+          </a:fontRef>
+        </p:style>
+        <p:txBody>
+          <a:bodyPr rtlCol="0" anchor="ctr"/>
+          <a:p>
+            <a:pPr algn="ctr"/>
+            <a:endParaRPr lang="zh-CN" altLang="en-US"/>
+          </a:p>
+        </p:txBody>
+      </p:sp>
     </p:spTree>
   </p:cSld>
   <p:clrMapOvr>
